--- a/generated/Tier 1 Broker Scorecards/Ewall Insurance Company_Broker_Scorecard.pptx
+++ b/generated/Tier 1 Broker Scorecards/Ewall Insurance Company_Broker_Scorecard.pptx
@@ -3357,7 +3357,7 @@
                         <a:rPr sz="800">
                           <a:latin typeface="Segoe UI"/>
                         </a:rPr>
-                        <a:t>$5,582,229.60 / $4,354,977.39 / $980,037.89</a:t>
+                        <a:t>$5,582,229.60 / $4,362,860.39 / $987,920.89</a:t>
                       </a:r>
                     </a:p>
                   </a:txBody>
@@ -3394,7 +3394,7 @@
                         <a:rPr sz="900">
                           <a:latin typeface="Segoe UI"/>
                         </a:rPr>
-                        <a:t>Tier 1  |  10.48% / 15.00%</a:t>
+                        <a:t>Tier 1  |  10.49% / 15.00%</a:t>
                       </a:r>
                     </a:p>
                   </a:txBody>
@@ -3431,7 +3431,7 @@
                         <a:rPr sz="900">
                           <a:latin typeface="Segoe UI"/>
                         </a:rPr>
-                        <a:t>$7,815,121.44  (12.5% achieved)</a:t>
+                        <a:t>$7,815,121.44  (12.6% achieved)</a:t>
                       </a:r>
                     </a:p>
                   </a:txBody>
@@ -3653,7 +3653,7 @@
                         <a:rPr sz="900">
                           <a:latin typeface="Segoe UI"/>
                         </a:rPr>
-                        <a:t>Fleet Subs: 30  |  Binds: 3</a:t>
+                        <a:t>Fleet Subs: 31  |  Binds: 3</a:t>
                       </a:r>
                     </a:p>
                   </a:txBody>
@@ -3690,7 +3690,7 @@
                         <a:rPr sz="900">
                           <a:latin typeface="Segoe UI"/>
                         </a:rPr>
-                        <a:t>Fleet Bound Premium: $145,469.20</a:t>
+                        <a:t>Fleet Bound Premium: $149,243.23</a:t>
                       </a:r>
                     </a:p>
                   </a:txBody>
@@ -3727,7 +3727,7 @@
                         <a:rPr sz="900">
                           <a:latin typeface="Segoe UI"/>
                         </a:rPr>
-                        <a:t>Fleet Book %: 14.8%</a:t>
+                        <a:t>Fleet Book %: 15.1%</a:t>
                       </a:r>
                     </a:p>
                   </a:txBody>
@@ -3766,7 +3766,7 @@
                         <a:rPr sz="900">
                           <a:latin typeface="Segoe UI"/>
                         </a:rPr>
-                        <a:t>Non-Fleet Subs: 800  |  Binds: 84</a:t>
+                        <a:t>Non-Fleet Subs: 808  |  Binds: 85</a:t>
                       </a:r>
                     </a:p>
                   </a:txBody>
@@ -3803,7 +3803,7 @@
                         <a:rPr sz="900">
                           <a:latin typeface="Segoe UI"/>
                         </a:rPr>
-                        <a:t>Non-Fleet Bound Premium: $834,568.69</a:t>
+                        <a:t>Non-Fleet Bound Premium: $838,677.66</a:t>
                       </a:r>
                     </a:p>
                   </a:txBody>
@@ -3840,7 +3840,7 @@
                         <a:rPr sz="900">
                           <a:latin typeface="Segoe UI"/>
                         </a:rPr>
-                        <a:t>Non-Fleet Book %: 85.2%</a:t>
+                        <a:t>Non-Fleet Book %: 84.9%</a:t>
                       </a:r>
                     </a:p>
                   </a:txBody>
@@ -4428,7 +4428,7 @@
                           </a:solidFill>
                           <a:latin typeface="Segoe UI"/>
                         </a:rPr>
-                        <a:t>128</a:t>
+                        <a:t>140</a:t>
                       </a:r>
                     </a:p>
                   </a:txBody>
@@ -4624,7 +4624,7 @@
                           </a:solidFill>
                           <a:latin typeface="Segoe UI"/>
                         </a:rPr>
-                        <a:t>18.3%</a:t>
+                        <a:t>18.7%</a:t>
                       </a:r>
                     </a:p>
                   </a:txBody>
@@ -4707,7 +4707,7 @@
                           </a:solidFill>
                           <a:latin typeface="Segoe UI"/>
                         </a:rPr>
-                        <a:t>10.9%</a:t>
+                        <a:t>12.1%</a:t>
                       </a:r>
                     </a:p>
                   </a:txBody>
@@ -4906,7 +4906,7 @@
                           </a:solidFill>
                           <a:latin typeface="Segoe UI"/>
                         </a:rPr>
-                        <a:t>45</a:t>
+                        <a:t>46</a:t>
                       </a:r>
                     </a:p>
                   </a:txBody>
@@ -4983,7 +4983,7 @@
                           </a:solidFill>
                           <a:latin typeface="Segoe UI"/>
                         </a:rPr>
-                        <a:t>14</a:t>
+                        <a:t>17</a:t>
                       </a:r>
                     </a:p>
                   </a:txBody>
@@ -5262,7 +5262,7 @@
                           </a:solidFill>
                           <a:latin typeface="Segoe UI"/>
                         </a:rPr>
-                        <a:t>$184.2K</a:t>
+                        <a:t>$192.1K</a:t>
                       </a:r>
                     </a:p>
                   </a:txBody>
@@ -5345,7 +5345,7 @@
                           </a:solidFill>
                           <a:latin typeface="Segoe UI"/>
                         </a:rPr>
-                        <a:t>$13.4K</a:t>
+                        <a:t>$14.4K</a:t>
                       </a:r>
                     </a:p>
                   </a:txBody>

--- a/generated/Tier 1 Broker Scorecards/Ewall Insurance Company_Broker_Scorecard.pptx
+++ b/generated/Tier 1 Broker Scorecards/Ewall Insurance Company_Broker_Scorecard.pptx
@@ -3394,7 +3394,7 @@
                         <a:rPr sz="900">
                           <a:latin typeface="Segoe UI"/>
                         </a:rPr>
-                        <a:t>Tier 1  |  10.49% / 15.00%</a:t>
+                        <a:t>Tier 1  |  10.34% / 15.00%</a:t>
                       </a:r>
                     </a:p>
                   </a:txBody>
@@ -3690,7 +3690,7 @@
                         <a:rPr sz="900">
                           <a:latin typeface="Segoe UI"/>
                         </a:rPr>
-                        <a:t>Fleet Bound Premium: $149,243.23</a:t>
+                        <a:t>Fleet Bound Premium: $114,079.76</a:t>
                       </a:r>
                     </a:p>
                   </a:txBody>
@@ -3727,7 +3727,7 @@
                         <a:rPr sz="900">
                           <a:latin typeface="Segoe UI"/>
                         </a:rPr>
-                        <a:t>Fleet Book %: 15.1%</a:t>
+                        <a:t>Fleet Book %: 11.5%</a:t>
                       </a:r>
                     </a:p>
                   </a:txBody>
@@ -3766,7 +3766,7 @@
                         <a:rPr sz="900">
                           <a:latin typeface="Segoe UI"/>
                         </a:rPr>
-                        <a:t>Non-Fleet Subs: 808  |  Binds: 85</a:t>
+                        <a:t>Non-Fleet Subs: 820  |  Binds: 85</a:t>
                       </a:r>
                     </a:p>
                   </a:txBody>
@@ -3803,7 +3803,7 @@
                         <a:rPr sz="900">
                           <a:latin typeface="Segoe UI"/>
                         </a:rPr>
-                        <a:t>Non-Fleet Bound Premium: $838,677.66</a:t>
+                        <a:t>Non-Fleet Bound Premium: $873,841.13</a:t>
                       </a:r>
                     </a:p>
                   </a:txBody>
@@ -3840,7 +3840,7 @@
                         <a:rPr sz="900">
                           <a:latin typeface="Segoe UI"/>
                         </a:rPr>
-                        <a:t>Non-Fleet Book %: 84.9%</a:t>
+                        <a:t>Non-Fleet Book %: 88.5%</a:t>
                       </a:r>
                     </a:p>
                   </a:txBody>
@@ -4428,7 +4428,7 @@
                           </a:solidFill>
                           <a:latin typeface="Segoe UI"/>
                         </a:rPr>
-                        <a:t>140</a:t>
+                        <a:t>156</a:t>
                       </a:r>
                     </a:p>
                   </a:txBody>
@@ -4707,7 +4707,7 @@
                           </a:solidFill>
                           <a:latin typeface="Segoe UI"/>
                         </a:rPr>
-                        <a:t>12.1%</a:t>
+                        <a:t>12.8%</a:t>
                       </a:r>
                     </a:p>
                   </a:txBody>
@@ -4747,7 +4747,7 @@
                         <a:rPr sz="800">
                           <a:latin typeface="Segoe UI"/>
                         </a:rPr>
-                        <a:t>19.6%</a:t>
+                        <a:t>20.0%</a:t>
                       </a:r>
                     </a:p>
                   </a:txBody>
@@ -4983,7 +4983,7 @@
                           </a:solidFill>
                           <a:latin typeface="Segoe UI"/>
                         </a:rPr>
-                        <a:t>17</a:t>
+                        <a:t>20</a:t>
                       </a:r>
                     </a:p>
                   </a:txBody>
@@ -5020,7 +5020,7 @@
                         <a:rPr sz="800">
                           <a:latin typeface="Segoe UI"/>
                         </a:rPr>
-                        <a:t>56</a:t>
+                        <a:t>57</a:t>
                       </a:r>
                     </a:p>
                   </a:txBody>

--- a/generated/Tier 1 Broker Scorecards/Ewall Insurance Company_Broker_Scorecard.pptx
+++ b/generated/Tier 1 Broker Scorecards/Ewall Insurance Company_Broker_Scorecard.pptx
@@ -3357,7 +3357,7 @@
                         <a:rPr sz="800">
                           <a:latin typeface="Segoe UI"/>
                         </a:rPr>
-                        <a:t>$5,582,229.60 / $4,362,860.39 / $987,920.89</a:t>
+                        <a:t>$5,582,229.60 / $4,375,438.95 / $1,000,499.45</a:t>
                       </a:r>
                     </a:p>
                   </a:txBody>
@@ -3394,7 +3394,7 @@
                         <a:rPr sz="900">
                           <a:latin typeface="Segoe UI"/>
                         </a:rPr>
-                        <a:t>Tier 1  |  10.34% / 15.00%</a:t>
+                        <a:t>Tier 1  |  10.61% / 15.00%</a:t>
                       </a:r>
                     </a:p>
                   </a:txBody>
@@ -3431,7 +3431,7 @@
                         <a:rPr sz="900">
                           <a:latin typeface="Segoe UI"/>
                         </a:rPr>
-                        <a:t>$7,815,121.44  (12.6% achieved)</a:t>
+                        <a:t>$7,815,121.44  (12.8% achieved)</a:t>
                       </a:r>
                     </a:p>
                   </a:txBody>
@@ -3690,7 +3690,7 @@
                         <a:rPr sz="900">
                           <a:latin typeface="Segoe UI"/>
                         </a:rPr>
-                        <a:t>Fleet Bound Premium: $114,079.76</a:t>
+                        <a:t>Fleet Bound Premium: $114,875.99</a:t>
                       </a:r>
                     </a:p>
                   </a:txBody>
@@ -3766,7 +3766,7 @@
                         <a:rPr sz="900">
                           <a:latin typeface="Segoe UI"/>
                         </a:rPr>
-                        <a:t>Non-Fleet Subs: 820  |  Binds: 85</a:t>
+                        <a:t>Non-Fleet Subs: 827  |  Binds: 88</a:t>
                       </a:r>
                     </a:p>
                   </a:txBody>
@@ -3803,7 +3803,7 @@
                         <a:rPr sz="900">
                           <a:latin typeface="Segoe UI"/>
                         </a:rPr>
-                        <a:t>Non-Fleet Bound Premium: $873,841.13</a:t>
+                        <a:t>Non-Fleet Bound Premium: $885,623.46</a:t>
                       </a:r>
                     </a:p>
                   </a:txBody>
@@ -4428,7 +4428,7 @@
                           </a:solidFill>
                           <a:latin typeface="Segoe UI"/>
                         </a:rPr>
-                        <a:t>156</a:t>
+                        <a:t>163</a:t>
                       </a:r>
                     </a:p>
                   </a:txBody>
@@ -4707,7 +4707,7 @@
                           </a:solidFill>
                           <a:latin typeface="Segoe UI"/>
                         </a:rPr>
-                        <a:t>12.8%</a:t>
+                        <a:t>12.9%</a:t>
                       </a:r>
                     </a:p>
                   </a:txBody>
@@ -4983,7 +4983,7 @@
                           </a:solidFill>
                           <a:latin typeface="Segoe UI"/>
                         </a:rPr>
-                        <a:t>20</a:t>
+                        <a:t>21</a:t>
                       </a:r>
                     </a:p>
                   </a:txBody>
@@ -5262,7 +5262,7 @@
                           </a:solidFill>
                           <a:latin typeface="Segoe UI"/>
                         </a:rPr>
-                        <a:t>$192.1K</a:t>
+                        <a:t>$204.7K</a:t>
                       </a:r>
                     </a:p>
                   </a:txBody>

--- a/generated/Tier 1 Broker Scorecards/Ewall Insurance Company_Broker_Scorecard.pptx
+++ b/generated/Tier 1 Broker Scorecards/Ewall Insurance Company_Broker_Scorecard.pptx
@@ -3357,7 +3357,7 @@
                         <a:rPr sz="800">
                           <a:latin typeface="Segoe UI"/>
                         </a:rPr>
-                        <a:t>$5,582,229.60 / $4,375,438.95 / $1,000,499.45</a:t>
+                        <a:t>$5,582,229.60 / $4,375,028.35 / $1,000,088.85</a:t>
                       </a:r>
                     </a:p>
                   </a:txBody>
@@ -3394,7 +3394,7 @@
                         <a:rPr sz="900">
                           <a:latin typeface="Segoe UI"/>
                         </a:rPr>
-                        <a:t>Tier 1  |  10.61% / 15.00%</a:t>
+                        <a:t>Tier 1  |  10.89% / 15.00%</a:t>
                       </a:r>
                     </a:p>
                   </a:txBody>
@@ -3653,7 +3653,7 @@
                         <a:rPr sz="900">
                           <a:latin typeface="Segoe UI"/>
                         </a:rPr>
-                        <a:t>Fleet Subs: 31  |  Binds: 3</a:t>
+                        <a:t>Fleet Subs: 30  |  Binds: 4</a:t>
                       </a:r>
                     </a:p>
                   </a:txBody>
@@ -3690,7 +3690,7 @@
                         <a:rPr sz="900">
                           <a:latin typeface="Segoe UI"/>
                         </a:rPr>
-                        <a:t>Fleet Bound Premium: $114,875.99</a:t>
+                        <a:t>Fleet Bound Premium: $143,733.99</a:t>
                       </a:r>
                     </a:p>
                   </a:txBody>
@@ -3727,7 +3727,7 @@
                         <a:rPr sz="900">
                           <a:latin typeface="Segoe UI"/>
                         </a:rPr>
-                        <a:t>Fleet Book %: 11.5%</a:t>
+                        <a:t>Fleet Book %: 14.4%</a:t>
                       </a:r>
                     </a:p>
                   </a:txBody>
@@ -3766,7 +3766,7 @@
                         <a:rPr sz="900">
                           <a:latin typeface="Segoe UI"/>
                         </a:rPr>
-                        <a:t>Non-Fleet Subs: 827  |  Binds: 88</a:t>
+                        <a:t>Non-Fleet Subs: 833  |  Binds: 90</a:t>
                       </a:r>
                     </a:p>
                   </a:txBody>
@@ -3803,7 +3803,7 @@
                         <a:rPr sz="900">
                           <a:latin typeface="Segoe UI"/>
                         </a:rPr>
-                        <a:t>Non-Fleet Bound Premium: $885,623.46</a:t>
+                        <a:t>Non-Fleet Bound Premium: $856,354.86</a:t>
                       </a:r>
                     </a:p>
                   </a:txBody>
@@ -3840,7 +3840,7 @@
                         <a:rPr sz="900">
                           <a:latin typeface="Segoe UI"/>
                         </a:rPr>
-                        <a:t>Non-Fleet Book %: 88.5%</a:t>
+                        <a:t>Non-Fleet Book %: 85.6%</a:t>
                       </a:r>
                     </a:p>
                   </a:txBody>
@@ -4428,7 +4428,7 @@
                           </a:solidFill>
                           <a:latin typeface="Segoe UI"/>
                         </a:rPr>
-                        <a:t>163</a:t>
+                        <a:t>169</a:t>
                       </a:r>
                     </a:p>
                   </a:txBody>
@@ -4707,7 +4707,7 @@
                           </a:solidFill>
                           <a:latin typeface="Segoe UI"/>
                         </a:rPr>
-                        <a:t>12.9%</a:t>
+                        <a:t>13.6%</a:t>
                       </a:r>
                     </a:p>
                   </a:txBody>
@@ -4983,7 +4983,7 @@
                           </a:solidFill>
                           <a:latin typeface="Segoe UI"/>
                         </a:rPr>
-                        <a:t>21</a:t>
+                        <a:t>23</a:t>
                       </a:r>
                     </a:p>
                   </a:txBody>
@@ -5262,7 +5262,7 @@
                           </a:solidFill>
                           <a:latin typeface="Segoe UI"/>
                         </a:rPr>
-                        <a:t>$204.7K</a:t>
+                        <a:t>$204.3K</a:t>
                       </a:r>
                     </a:p>
                   </a:txBody>

--- a/generated/Tier 1 Broker Scorecards/Ewall Insurance Company_Broker_Scorecard.pptx
+++ b/generated/Tier 1 Broker Scorecards/Ewall Insurance Company_Broker_Scorecard.pptx
@@ -3357,7 +3357,7 @@
                         <a:rPr sz="800">
                           <a:latin typeface="Segoe UI"/>
                         </a:rPr>
-                        <a:t>$5,582,229.60 / $4,375,028.35 / $1,000,088.85</a:t>
+                        <a:t>$5,582,229.60 / $4,381,270.54 / $1,006,331.04</a:t>
                       </a:r>
                     </a:p>
                   </a:txBody>
@@ -3394,7 +3394,7 @@
                         <a:rPr sz="900">
                           <a:latin typeface="Segoe UI"/>
                         </a:rPr>
-                        <a:t>Tier 1  |  10.89% / 15.00%</a:t>
+                        <a:t>Tier 1  |  10.59% / 15.00%</a:t>
                       </a:r>
                     </a:p>
                   </a:txBody>
@@ -3431,7 +3431,7 @@
                         <a:rPr sz="900">
                           <a:latin typeface="Segoe UI"/>
                         </a:rPr>
-                        <a:t>$7,815,121.44  (12.8% achieved)</a:t>
+                        <a:t>$7,815,121.44  (12.9% achieved)</a:t>
                       </a:r>
                     </a:p>
                   </a:txBody>
@@ -3653,7 +3653,7 @@
                         <a:rPr sz="900">
                           <a:latin typeface="Segoe UI"/>
                         </a:rPr>
-                        <a:t>Fleet Subs: 30  |  Binds: 4</a:t>
+                        <a:t>Fleet Subs: 30  |  Binds: 3</a:t>
                       </a:r>
                     </a:p>
                   </a:txBody>
@@ -3690,7 +3690,7 @@
                         <a:rPr sz="900">
                           <a:latin typeface="Segoe UI"/>
                         </a:rPr>
-                        <a:t>Fleet Bound Premium: $143,733.99</a:t>
+                        <a:t>Fleet Bound Premium: $118,707.27</a:t>
                       </a:r>
                     </a:p>
                   </a:txBody>
@@ -3727,7 +3727,7 @@
                         <a:rPr sz="900">
                           <a:latin typeface="Segoe UI"/>
                         </a:rPr>
-                        <a:t>Fleet Book %: 14.4%</a:t>
+                        <a:t>Fleet Book %: 11.8%</a:t>
                       </a:r>
                     </a:p>
                   </a:txBody>
@@ -3766,7 +3766,7 @@
                         <a:rPr sz="900">
                           <a:latin typeface="Segoe UI"/>
                         </a:rPr>
-                        <a:t>Non-Fleet Subs: 833  |  Binds: 90</a:t>
+                        <a:t>Non-Fleet Subs: 839  |  Binds: 89</a:t>
                       </a:r>
                     </a:p>
                   </a:txBody>
@@ -3803,7 +3803,7 @@
                         <a:rPr sz="900">
                           <a:latin typeface="Segoe UI"/>
                         </a:rPr>
-                        <a:t>Non-Fleet Bound Premium: $856,354.86</a:t>
+                        <a:t>Non-Fleet Bound Premium: $887,623.77</a:t>
                       </a:r>
                     </a:p>
                   </a:txBody>
@@ -3840,7 +3840,7 @@
                         <a:rPr sz="900">
                           <a:latin typeface="Segoe UI"/>
                         </a:rPr>
-                        <a:t>Non-Fleet Book %: 85.6%</a:t>
+                        <a:t>Non-Fleet Book %: 88.2%</a:t>
                       </a:r>
                     </a:p>
                   </a:txBody>
@@ -4351,7 +4351,7 @@
                           </a:solidFill>
                           <a:latin typeface="Segoe UI"/>
                         </a:rPr>
-                        <a:t>246</a:t>
+                        <a:t>245</a:t>
                       </a:r>
                     </a:p>
                   </a:txBody>
@@ -4428,7 +4428,7 @@
                           </a:solidFill>
                           <a:latin typeface="Segoe UI"/>
                         </a:rPr>
-                        <a:t>169</a:t>
+                        <a:t>181</a:t>
                       </a:r>
                     </a:p>
                   </a:txBody>
@@ -4624,7 +4624,7 @@
                           </a:solidFill>
                           <a:latin typeface="Segoe UI"/>
                         </a:rPr>
-                        <a:t>18.7%</a:t>
+                        <a:t>18.0%</a:t>
                       </a:r>
                     </a:p>
                   </a:txBody>
@@ -4707,7 +4707,7 @@
                           </a:solidFill>
                           <a:latin typeface="Segoe UI"/>
                         </a:rPr>
-                        <a:t>13.6%</a:t>
+                        <a:t>15.5%</a:t>
                       </a:r>
                     </a:p>
                   </a:txBody>
@@ -4747,7 +4747,7 @@
                         <a:rPr sz="800">
                           <a:latin typeface="Segoe UI"/>
                         </a:rPr>
-                        <a:t>20.0%</a:t>
+                        <a:t>19.6%</a:t>
                       </a:r>
                     </a:p>
                   </a:txBody>
@@ -4906,7 +4906,7 @@
                           </a:solidFill>
                           <a:latin typeface="Segoe UI"/>
                         </a:rPr>
-                        <a:t>46</a:t>
+                        <a:t>44</a:t>
                       </a:r>
                     </a:p>
                   </a:txBody>
@@ -4983,7 +4983,7 @@
                           </a:solidFill>
                           <a:latin typeface="Segoe UI"/>
                         </a:rPr>
-                        <a:t>23</a:t>
+                        <a:t>28</a:t>
                       </a:r>
                     </a:p>
                   </a:txBody>
@@ -5020,7 +5020,7 @@
                         <a:rPr sz="800">
                           <a:latin typeface="Segoe UI"/>
                         </a:rPr>
-                        <a:t>57</a:t>
+                        <a:t>56</a:t>
                       </a:r>
                     </a:p>
                   </a:txBody>
@@ -5262,7 +5262,7 @@
                           </a:solidFill>
                           <a:latin typeface="Segoe UI"/>
                         </a:rPr>
-                        <a:t>$204.3K</a:t>
+                        <a:t>$210.5K</a:t>
                       </a:r>
                     </a:p>
                   </a:txBody>
@@ -5345,7 +5345,7 @@
                           </a:solidFill>
                           <a:latin typeface="Segoe UI"/>
                         </a:rPr>
-                        <a:t>$14.4K</a:t>
+                        <a:t>$19.5K</a:t>
                       </a:r>
                     </a:p>
                   </a:txBody>

--- a/generated/Tier 1 Broker Scorecards/Ewall Insurance Company_Broker_Scorecard.pptx
+++ b/generated/Tier 1 Broker Scorecards/Ewall Insurance Company_Broker_Scorecard.pptx
@@ -3394,7 +3394,7 @@
                         <a:rPr sz="900">
                           <a:latin typeface="Segoe UI"/>
                         </a:rPr>
-                        <a:t>Tier 1  |  10.59% / 15.00%</a:t>
+                        <a:t>Tier 1  |  10.70% / 15.00%</a:t>
                       </a:r>
                     </a:p>
                   </a:txBody>
@@ -3653,7 +3653,7 @@
                         <a:rPr sz="900">
                           <a:latin typeface="Segoe UI"/>
                         </a:rPr>
-                        <a:t>Fleet Subs: 30  |  Binds: 3</a:t>
+                        <a:t>Fleet Subs: 30  |  Binds: 4</a:t>
                       </a:r>
                     </a:p>
                   </a:txBody>
@@ -3690,7 +3690,7 @@
                         <a:rPr sz="900">
                           <a:latin typeface="Segoe UI"/>
                         </a:rPr>
-                        <a:t>Fleet Bound Premium: $118,707.27</a:t>
+                        <a:t>Fleet Bound Premium: $150,853.43</a:t>
                       </a:r>
                     </a:p>
                   </a:txBody>
@@ -3727,7 +3727,7 @@
                         <a:rPr sz="900">
                           <a:latin typeface="Segoe UI"/>
                         </a:rPr>
-                        <a:t>Fleet Book %: 11.8%</a:t>
+                        <a:t>Fleet Book %: 15.0%</a:t>
                       </a:r>
                     </a:p>
                   </a:txBody>
@@ -3803,7 +3803,7 @@
                         <a:rPr sz="900">
                           <a:latin typeface="Segoe UI"/>
                         </a:rPr>
-                        <a:t>Non-Fleet Bound Premium: $887,623.77</a:t>
+                        <a:t>Non-Fleet Bound Premium: $855,477.61</a:t>
                       </a:r>
                     </a:p>
                   </a:txBody>
@@ -3840,7 +3840,7 @@
                         <a:rPr sz="900">
                           <a:latin typeface="Segoe UI"/>
                         </a:rPr>
-                        <a:t>Non-Fleet Book %: 88.2%</a:t>
+                        <a:t>Non-Fleet Book %: 85.0%</a:t>
                       </a:r>
                     </a:p>
                   </a:txBody>
@@ -4707,7 +4707,7 @@
                           </a:solidFill>
                           <a:latin typeface="Segoe UI"/>
                         </a:rPr>
-                        <a:t>15.5%</a:t>
+                        <a:t>16.0%</a:t>
                       </a:r>
                     </a:p>
                   </a:txBody>
@@ -4983,7 +4983,7 @@
                           </a:solidFill>
                           <a:latin typeface="Segoe UI"/>
                         </a:rPr>
-                        <a:t>28</a:t>
+                        <a:t>29</a:t>
                       </a:r>
                     </a:p>
                   </a:txBody>

--- a/generated/Tier 1 Broker Scorecards/Ewall Insurance Company_Broker_Scorecard.pptx
+++ b/generated/Tier 1 Broker Scorecards/Ewall Insurance Company_Broker_Scorecard.pptx
@@ -3394,7 +3394,7 @@
                         <a:rPr sz="900">
                           <a:latin typeface="Segoe UI"/>
                         </a:rPr>
-                        <a:t>Tier 1  |  10.70% / 15.00%</a:t>
+                        <a:t>Tier 1  |  10.82% / 15.00%</a:t>
                       </a:r>
                     </a:p>
                   </a:txBody>
@@ -3690,7 +3690,7 @@
                         <a:rPr sz="900">
                           <a:latin typeface="Segoe UI"/>
                         </a:rPr>
-                        <a:t>Fleet Bound Premium: $150,853.43</a:t>
+                        <a:t>Fleet Bound Premium: $148,812.13</a:t>
                       </a:r>
                     </a:p>
                   </a:txBody>
@@ -3727,7 +3727,7 @@
                         <a:rPr sz="900">
                           <a:latin typeface="Segoe UI"/>
                         </a:rPr>
-                        <a:t>Fleet Book %: 15.0%</a:t>
+                        <a:t>Fleet Book %: 14.8%</a:t>
                       </a:r>
                     </a:p>
                   </a:txBody>
@@ -3766,7 +3766,7 @@
                         <a:rPr sz="900">
                           <a:latin typeface="Segoe UI"/>
                         </a:rPr>
-                        <a:t>Non-Fleet Subs: 839  |  Binds: 89</a:t>
+                        <a:t>Non-Fleet Subs: 839  |  Binds: 90</a:t>
                       </a:r>
                     </a:p>
                   </a:txBody>
@@ -3803,7 +3803,7 @@
                         <a:rPr sz="900">
                           <a:latin typeface="Segoe UI"/>
                         </a:rPr>
-                        <a:t>Non-Fleet Bound Premium: $855,477.61</a:t>
+                        <a:t>Non-Fleet Bound Premium: $857,518.91</a:t>
                       </a:r>
                     </a:p>
                   </a:txBody>
@@ -3840,7 +3840,7 @@
                         <a:rPr sz="900">
                           <a:latin typeface="Segoe UI"/>
                         </a:rPr>
-                        <a:t>Non-Fleet Book %: 85.0%</a:t>
+                        <a:t>Non-Fleet Book %: 85.2%</a:t>
                       </a:r>
                     </a:p>
                   </a:txBody>
@@ -4747,7 +4747,7 @@
                         <a:rPr sz="800">
                           <a:latin typeface="Segoe UI"/>
                         </a:rPr>
-                        <a:t>19.6%</a:t>
+                        <a:t>20.0%</a:t>
                       </a:r>
                     </a:p>
                   </a:txBody>
@@ -5020,7 +5020,7 @@
                         <a:rPr sz="800">
                           <a:latin typeface="Segoe UI"/>
                         </a:rPr>
-                        <a:t>56</a:t>
+                        <a:t>57</a:t>
                       </a:r>
                     </a:p>
                   </a:txBody>

--- a/generated/Tier 1 Broker Scorecards/Ewall Insurance Company_Broker_Scorecard.pptx
+++ b/generated/Tier 1 Broker Scorecards/Ewall Insurance Company_Broker_Scorecard.pptx
@@ -3357,7 +3357,7 @@
                         <a:rPr sz="800">
                           <a:latin typeface="Segoe UI"/>
                         </a:rPr>
-                        <a:t>$5,582,229.60 / $4,381,270.54 / $1,006,331.04</a:t>
+                        <a:t>$5,582,229.60 / $4,381,606.58 / $1,006,667.08</a:t>
                       </a:r>
                     </a:p>
                   </a:txBody>
@@ -3394,7 +3394,7 @@
                         <a:rPr sz="900">
                           <a:latin typeface="Segoe UI"/>
                         </a:rPr>
-                        <a:t>Tier 1  |  10.82% / 15.00%</a:t>
+                        <a:t>Tier 1  |  10.93% / 15.00%</a:t>
                       </a:r>
                     </a:p>
                   </a:txBody>
@@ -3653,7 +3653,7 @@
                         <a:rPr sz="900">
                           <a:latin typeface="Segoe UI"/>
                         </a:rPr>
-                        <a:t>Fleet Subs: 30  |  Binds: 4</a:t>
+                        <a:t>Fleet Subs: 31  |  Binds: 4</a:t>
                       </a:r>
                     </a:p>
                   </a:txBody>
@@ -3690,7 +3690,7 @@
                         <a:rPr sz="900">
                           <a:latin typeface="Segoe UI"/>
                         </a:rPr>
-                        <a:t>Fleet Bound Premium: $148,812.13</a:t>
+                        <a:t>Fleet Bound Premium: $145,064.59</a:t>
                       </a:r>
                     </a:p>
                   </a:txBody>
@@ -3727,7 +3727,7 @@
                         <a:rPr sz="900">
                           <a:latin typeface="Segoe UI"/>
                         </a:rPr>
-                        <a:t>Fleet Book %: 14.8%</a:t>
+                        <a:t>Fleet Book %: 14.4%</a:t>
                       </a:r>
                     </a:p>
                   </a:txBody>
@@ -3766,7 +3766,7 @@
                         <a:rPr sz="900">
                           <a:latin typeface="Segoe UI"/>
                         </a:rPr>
-                        <a:t>Non-Fleet Subs: 839  |  Binds: 90</a:t>
+                        <a:t>Non-Fleet Subs: 847  |  Binds: 92</a:t>
                       </a:r>
                     </a:p>
                   </a:txBody>
@@ -3803,7 +3803,7 @@
                         <a:rPr sz="900">
                           <a:latin typeface="Segoe UI"/>
                         </a:rPr>
-                        <a:t>Non-Fleet Bound Premium: $857,518.91</a:t>
+                        <a:t>Non-Fleet Bound Premium: $861,602.49</a:t>
                       </a:r>
                     </a:p>
                   </a:txBody>
@@ -3840,7 +3840,7 @@
                         <a:rPr sz="900">
                           <a:latin typeface="Segoe UI"/>
                         </a:rPr>
-                        <a:t>Non-Fleet Book %: 85.2%</a:t>
+                        <a:t>Non-Fleet Book %: 85.6%</a:t>
                       </a:r>
                     </a:p>
                   </a:txBody>
@@ -4428,7 +4428,7 @@
                           </a:solidFill>
                           <a:latin typeface="Segoe UI"/>
                         </a:rPr>
-                        <a:t>181</a:t>
+                        <a:t>191</a:t>
                       </a:r>
                     </a:p>
                   </a:txBody>
@@ -4707,7 +4707,7 @@
                           </a:solidFill>
                           <a:latin typeface="Segoe UI"/>
                         </a:rPr>
-                        <a:t>16.0%</a:t>
+                        <a:t>16.2%</a:t>
                       </a:r>
                     </a:p>
                   </a:txBody>
@@ -4747,7 +4747,7 @@
                         <a:rPr sz="800">
                           <a:latin typeface="Segoe UI"/>
                         </a:rPr>
-                        <a:t>20.0%</a:t>
+                        <a:t>19.6%</a:t>
                       </a:r>
                     </a:p>
                   </a:txBody>
@@ -4983,7 +4983,7 @@
                           </a:solidFill>
                           <a:latin typeface="Segoe UI"/>
                         </a:rPr>
-                        <a:t>29</a:t>
+                        <a:t>31</a:t>
                       </a:r>
                     </a:p>
                   </a:txBody>
@@ -5020,7 +5020,7 @@
                         <a:rPr sz="800">
                           <a:latin typeface="Segoe UI"/>
                         </a:rPr>
-                        <a:t>57</a:t>
+                        <a:t>56</a:t>
                       </a:r>
                     </a:p>
                   </a:txBody>
@@ -5262,7 +5262,7 @@
                           </a:solidFill>
                           <a:latin typeface="Segoe UI"/>
                         </a:rPr>
-                        <a:t>$210.5K</a:t>
+                        <a:t>$210.8K</a:t>
                       </a:r>
                     </a:p>
                   </a:txBody>

--- a/generated/Tier 1 Broker Scorecards/Ewall Insurance Company_Broker_Scorecard.pptx
+++ b/generated/Tier 1 Broker Scorecards/Ewall Insurance Company_Broker_Scorecard.pptx
@@ -3357,7 +3357,7 @@
                         <a:rPr sz="800">
                           <a:latin typeface="Segoe UI"/>
                         </a:rPr>
-                        <a:t>$5,582,229.60 / $4,381,606.58 / $1,006,667.08</a:t>
+                        <a:t>$5,582,229.60 / $4,382,021.57 / $1,007,082.07</a:t>
                       </a:r>
                     </a:p>
                   </a:txBody>
@@ -3394,7 +3394,7 @@
                         <a:rPr sz="900">
                           <a:latin typeface="Segoe UI"/>
                         </a:rPr>
-                        <a:t>Tier 1  |  10.93% / 15.00%</a:t>
+                        <a:t>Tier 1  |  10.51% / 15.00%</a:t>
                       </a:r>
                     </a:p>
                   </a:txBody>
@@ -3690,7 +3690,7 @@
                         <a:rPr sz="900">
                           <a:latin typeface="Segoe UI"/>
                         </a:rPr>
-                        <a:t>Fleet Bound Premium: $145,064.59</a:t>
+                        <a:t>Fleet Bound Premium: $151,450.54</a:t>
                       </a:r>
                     </a:p>
                   </a:txBody>
@@ -3727,7 +3727,7 @@
                         <a:rPr sz="900">
                           <a:latin typeface="Segoe UI"/>
                         </a:rPr>
-                        <a:t>Fleet Book %: 14.4%</a:t>
+                        <a:t>Fleet Book %: 15.0%</a:t>
                       </a:r>
                     </a:p>
                   </a:txBody>
@@ -3766,7 +3766,7 @@
                         <a:rPr sz="900">
                           <a:latin typeface="Segoe UI"/>
                         </a:rPr>
-                        <a:t>Non-Fleet Subs: 847  |  Binds: 92</a:t>
+                        <a:t>Non-Fleet Subs: 854  |  Binds: 89</a:t>
                       </a:r>
                     </a:p>
                   </a:txBody>
@@ -3803,7 +3803,7 @@
                         <a:rPr sz="900">
                           <a:latin typeface="Segoe UI"/>
                         </a:rPr>
-                        <a:t>Non-Fleet Bound Premium: $861,602.49</a:t>
+                        <a:t>Non-Fleet Bound Premium: $855,631.53</a:t>
                       </a:r>
                     </a:p>
                   </a:txBody>
@@ -3840,7 +3840,7 @@
                         <a:rPr sz="900">
                           <a:latin typeface="Segoe UI"/>
                         </a:rPr>
-                        <a:t>Non-Fleet Book %: 85.6%</a:t>
+                        <a:t>Non-Fleet Book %: 85.0%</a:t>
                       </a:r>
                     </a:p>
                   </a:txBody>
@@ -4428,7 +4428,7 @@
                           </a:solidFill>
                           <a:latin typeface="Segoe UI"/>
                         </a:rPr>
-                        <a:t>191</a:t>
+                        <a:t>202</a:t>
                       </a:r>
                     </a:p>
                   </a:txBody>
@@ -4707,7 +4707,7 @@
                           </a:solidFill>
                           <a:latin typeface="Segoe UI"/>
                         </a:rPr>
-                        <a:t>16.2%</a:t>
+                        <a:t>15.3%</a:t>
                       </a:r>
                     </a:p>
                   </a:txBody>
@@ -5262,7 +5262,7 @@
                           </a:solidFill>
                           <a:latin typeface="Segoe UI"/>
                         </a:rPr>
-                        <a:t>$210.8K</a:t>
+                        <a:t>$211.3K</a:t>
                       </a:r>
                     </a:p>
                   </a:txBody>

--- a/generated/Tier 1 Broker Scorecards/Ewall Insurance Company_Broker_Scorecard.pptx
+++ b/generated/Tier 1 Broker Scorecards/Ewall Insurance Company_Broker_Scorecard.pptx
@@ -3394,7 +3394,7 @@
                         <a:rPr sz="900">
                           <a:latin typeface="Segoe UI"/>
                         </a:rPr>
-                        <a:t>Tier 1  |  10.51% / 15.00%</a:t>
+                        <a:t>Tier 1  |  10.48% / 15.00%</a:t>
                       </a:r>
                     </a:p>
                   </a:txBody>
@@ -3766,7 +3766,7 @@
                         <a:rPr sz="900">
                           <a:latin typeface="Segoe UI"/>
                         </a:rPr>
-                        <a:t>Non-Fleet Subs: 854  |  Binds: 89</a:t>
+                        <a:t>Non-Fleet Subs: 856  |  Binds: 89</a:t>
                       </a:r>
                     </a:p>
                   </a:txBody>
@@ -4428,7 +4428,7 @@
                           </a:solidFill>
                           <a:latin typeface="Segoe UI"/>
                         </a:rPr>
-                        <a:t>202</a:t>
+                        <a:t>205</a:t>
                       </a:r>
                     </a:p>
                   </a:txBody>
@@ -4707,7 +4707,7 @@
                           </a:solidFill>
                           <a:latin typeface="Segoe UI"/>
                         </a:rPr>
-                        <a:t>15.3%</a:t>
+                        <a:t>15.1%</a:t>
                       </a:r>
                     </a:p>
                   </a:txBody>

--- a/generated/Tier 1 Broker Scorecards/Ewall Insurance Company_Broker_Scorecard.pptx
+++ b/generated/Tier 1 Broker Scorecards/Ewall Insurance Company_Broker_Scorecard.pptx
@@ -3394,7 +3394,7 @@
                         <a:rPr sz="900">
                           <a:latin typeface="Segoe UI"/>
                         </a:rPr>
-                        <a:t>Tier 1  |  10.48% / 15.00%</a:t>
+                        <a:t>Tier 1  |  10.56% / 15.00%</a:t>
                       </a:r>
                     </a:p>
                   </a:txBody>
@@ -3690,7 +3690,7 @@
                         <a:rPr sz="900">
                           <a:latin typeface="Segoe UI"/>
                         </a:rPr>
-                        <a:t>Fleet Bound Premium: $151,450.54</a:t>
+                        <a:t>Fleet Bound Premium: $148,925.02</a:t>
                       </a:r>
                     </a:p>
                   </a:txBody>
@@ -3727,7 +3727,7 @@
                         <a:rPr sz="900">
                           <a:latin typeface="Segoe UI"/>
                         </a:rPr>
-                        <a:t>Fleet Book %: 15.0%</a:t>
+                        <a:t>Fleet Book %: 14.8%</a:t>
                       </a:r>
                     </a:p>
                   </a:txBody>
@@ -3766,7 +3766,7 @@
                         <a:rPr sz="900">
                           <a:latin typeface="Segoe UI"/>
                         </a:rPr>
-                        <a:t>Non-Fleet Subs: 856  |  Binds: 89</a:t>
+                        <a:t>Non-Fleet Subs: 859  |  Binds: 90</a:t>
                       </a:r>
                     </a:p>
                   </a:txBody>
@@ -3803,7 +3803,7 @@
                         <a:rPr sz="900">
                           <a:latin typeface="Segoe UI"/>
                         </a:rPr>
-                        <a:t>Non-Fleet Bound Premium: $855,631.53</a:t>
+                        <a:t>Non-Fleet Bound Premium: $858,157.05</a:t>
                       </a:r>
                     </a:p>
                   </a:txBody>
@@ -3840,7 +3840,7 @@
                         <a:rPr sz="900">
                           <a:latin typeface="Segoe UI"/>
                         </a:rPr>
-                        <a:t>Non-Fleet Book %: 85.0%</a:t>
+                        <a:t>Non-Fleet Book %: 85.2%</a:t>
                       </a:r>
                     </a:p>
                   </a:txBody>
@@ -4428,7 +4428,7 @@
                           </a:solidFill>
                           <a:latin typeface="Segoe UI"/>
                         </a:rPr>
-                        <a:t>205</a:t>
+                        <a:t>208</a:t>
                       </a:r>
                     </a:p>
                   </a:txBody>
@@ -4707,7 +4707,7 @@
                           </a:solidFill>
                           <a:latin typeface="Segoe UI"/>
                         </a:rPr>
-                        <a:t>15.1%</a:t>
+                        <a:t>14.9%</a:t>
                       </a:r>
                     </a:p>
                   </a:txBody>
@@ -5345,7 +5345,7 @@
                           </a:solidFill>
                           <a:latin typeface="Segoe UI"/>
                         </a:rPr>
-                        <a:t>$19.5K</a:t>
+                        <a:t>$44.3K</a:t>
                       </a:r>
                     </a:p>
                   </a:txBody>

--- a/generated/Tier 1 Broker Scorecards/Ewall Insurance Company_Broker_Scorecard.pptx
+++ b/generated/Tier 1 Broker Scorecards/Ewall Insurance Company_Broker_Scorecard.pptx
@@ -3394,7 +3394,7 @@
                         <a:rPr sz="900">
                           <a:latin typeface="Segoe UI"/>
                         </a:rPr>
-                        <a:t>Tier 1  |  10.56% / 15.00%</a:t>
+                        <a:t>Tier 1  |  10.67% / 15.00%</a:t>
                       </a:r>
                     </a:p>
                   </a:txBody>
@@ -3690,7 +3690,7 @@
                         <a:rPr sz="900">
                           <a:latin typeface="Segoe UI"/>
                         </a:rPr>
-                        <a:t>Fleet Bound Premium: $148,925.02</a:t>
+                        <a:t>Fleet Bound Premium: $147,616.17</a:t>
                       </a:r>
                     </a:p>
                   </a:txBody>
@@ -3727,7 +3727,7 @@
                         <a:rPr sz="900">
                           <a:latin typeface="Segoe UI"/>
                         </a:rPr>
-                        <a:t>Fleet Book %: 14.8%</a:t>
+                        <a:t>Fleet Book %: 14.7%</a:t>
                       </a:r>
                     </a:p>
                   </a:txBody>
@@ -3766,7 +3766,7 @@
                         <a:rPr sz="900">
                           <a:latin typeface="Segoe UI"/>
                         </a:rPr>
-                        <a:t>Non-Fleet Subs: 859  |  Binds: 90</a:t>
+                        <a:t>Non-Fleet Subs: 859  |  Binds: 91</a:t>
                       </a:r>
                     </a:p>
                   </a:txBody>
@@ -3803,7 +3803,7 @@
                         <a:rPr sz="900">
                           <a:latin typeface="Segoe UI"/>
                         </a:rPr>
-                        <a:t>Non-Fleet Bound Premium: $858,157.05</a:t>
+                        <a:t>Non-Fleet Bound Premium: $859,465.90</a:t>
                       </a:r>
                     </a:p>
                   </a:txBody>
@@ -3840,7 +3840,7 @@
                         <a:rPr sz="900">
                           <a:latin typeface="Segoe UI"/>
                         </a:rPr>
-                        <a:t>Non-Fleet Book %: 85.2%</a:t>
+                        <a:t>Non-Fleet Book %: 85.3%</a:t>
                       </a:r>
                     </a:p>
                   </a:txBody>
@@ -4428,7 +4428,7 @@
                           </a:solidFill>
                           <a:latin typeface="Segoe UI"/>
                         </a:rPr>
-                        <a:t>208</a:t>
+                        <a:t>209</a:t>
                       </a:r>
                     </a:p>
                   </a:txBody>
@@ -4707,7 +4707,7 @@
                           </a:solidFill>
                           <a:latin typeface="Segoe UI"/>
                         </a:rPr>
-                        <a:t>14.9%</a:t>
+                        <a:t>14.8%</a:t>
                       </a:r>
                     </a:p>
                   </a:txBody>

--- a/generated/Tier 1 Broker Scorecards/Ewall Insurance Company_Broker_Scorecard.pptx
+++ b/generated/Tier 1 Broker Scorecards/Ewall Insurance Company_Broker_Scorecard.pptx
@@ -3357,7 +3357,7 @@
                         <a:rPr sz="800">
                           <a:latin typeface="Segoe UI"/>
                         </a:rPr>
-                        <a:t>$5,582,229.60 / $4,382,021.57 / $1,007,082.07</a:t>
+                        <a:t>$5,582,229.60 / $3,838,877.89 / $1,051,404.37</a:t>
                       </a:r>
                     </a:p>
                   </a:txBody>
@@ -3431,7 +3431,7 @@
                         <a:rPr sz="900">
                           <a:latin typeface="Segoe UI"/>
                         </a:rPr>
-                        <a:t>$7,815,121.44  (12.9% achieved)</a:t>
+                        <a:t>$7,815,121.44  (13.5% achieved)</a:t>
                       </a:r>
                     </a:p>
                   </a:txBody>
@@ -3690,7 +3690,7 @@
                         <a:rPr sz="900">
                           <a:latin typeface="Segoe UI"/>
                         </a:rPr>
-                        <a:t>Fleet Bound Premium: $147,616.17</a:t>
+                        <a:t>Fleet Bound Premium: $154,112.85</a:t>
                       </a:r>
                     </a:p>
                   </a:txBody>
@@ -3803,7 +3803,7 @@
                         <a:rPr sz="900">
                           <a:latin typeface="Segoe UI"/>
                         </a:rPr>
-                        <a:t>Non-Fleet Bound Premium: $859,465.90</a:t>
+                        <a:t>Non-Fleet Bound Premium: $897,291.52</a:t>
                       </a:r>
                     </a:p>
                   </a:txBody>
